--- a/AI-tools/AI-Talk-LessTechnical/Potential_use_case_of_AI_in_Jordan.pptx
+++ b/AI-tools/AI-Talk-LessTechnical/Potential_use_case_of_AI_in_Jordan.pptx
@@ -229,7 +229,7 @@
           <a:p>
             <a:fld id="{7BAEECA8-D063-486F-AE31-5020270C1449}" type="datetimeFigureOut">
               <a:rPr lang="en-US" smtClean="0"/>
-              <a:t>5/14/2026</a:t>
+              <a:t>5/24/2026</a:t>
             </a:fld>
             <a:endParaRPr lang="en-US"/>
           </a:p>
@@ -406,7 +406,7 @@
           <a:p>
             <a:fld id="{CB233BD1-3BA8-448D-9D08-7846095EA517}" type="datetimeFigureOut">
               <a:rPr lang="en-US" smtClean="0"/>
-              <a:t>5/14/2026</a:t>
+              <a:t>5/24/2026</a:t>
             </a:fld>
             <a:endParaRPr lang="en-US"/>
           </a:p>
@@ -820,7 +820,7 @@
           <a:p>
             <a:fld id="{6383FAE1-13DE-4511-8C1B-C8AFB720664C}" type="datetimeFigureOut">
               <a:rPr lang="en-US" smtClean="0"/>
-              <a:t>5/14/2026</a:t>
+              <a:t>5/24/2026</a:t>
             </a:fld>
             <a:endParaRPr lang="en-US"/>
           </a:p>
@@ -1018,7 +1018,7 @@
           <a:p>
             <a:fld id="{6383FAE1-13DE-4511-8C1B-C8AFB720664C}" type="datetimeFigureOut">
               <a:rPr lang="en-US" smtClean="0"/>
-              <a:t>5/14/2026</a:t>
+              <a:t>5/24/2026</a:t>
             </a:fld>
             <a:endParaRPr lang="en-US"/>
           </a:p>
@@ -1226,7 +1226,7 @@
           <a:p>
             <a:fld id="{6383FAE1-13DE-4511-8C1B-C8AFB720664C}" type="datetimeFigureOut">
               <a:rPr lang="en-US" smtClean="0"/>
-              <a:t>5/14/2026</a:t>
+              <a:t>5/24/2026</a:t>
             </a:fld>
             <a:endParaRPr lang="en-US"/>
           </a:p>
@@ -1424,7 +1424,7 @@
           <a:p>
             <a:fld id="{6383FAE1-13DE-4511-8C1B-C8AFB720664C}" type="datetimeFigureOut">
               <a:rPr lang="en-US" smtClean="0"/>
-              <a:t>5/14/2026</a:t>
+              <a:t>5/24/2026</a:t>
             </a:fld>
             <a:endParaRPr lang="en-US"/>
           </a:p>
@@ -1699,7 +1699,7 @@
           <a:p>
             <a:fld id="{6383FAE1-13DE-4511-8C1B-C8AFB720664C}" type="datetimeFigureOut">
               <a:rPr lang="en-US" smtClean="0"/>
-              <a:t>5/14/2026</a:t>
+              <a:t>5/24/2026</a:t>
             </a:fld>
             <a:endParaRPr lang="en-US"/>
           </a:p>
@@ -1964,7 +1964,7 @@
           <a:p>
             <a:fld id="{6383FAE1-13DE-4511-8C1B-C8AFB720664C}" type="datetimeFigureOut">
               <a:rPr lang="en-US" smtClean="0"/>
-              <a:t>5/14/2026</a:t>
+              <a:t>5/24/2026</a:t>
             </a:fld>
             <a:endParaRPr lang="en-US"/>
           </a:p>
@@ -2376,7 +2376,7 @@
           <a:p>
             <a:fld id="{6383FAE1-13DE-4511-8C1B-C8AFB720664C}" type="datetimeFigureOut">
               <a:rPr lang="en-US" smtClean="0"/>
-              <a:t>5/14/2026</a:t>
+              <a:t>5/24/2026</a:t>
             </a:fld>
             <a:endParaRPr lang="en-US"/>
           </a:p>
@@ -2517,7 +2517,7 @@
           <a:p>
             <a:fld id="{6383FAE1-13DE-4511-8C1B-C8AFB720664C}" type="datetimeFigureOut">
               <a:rPr lang="en-US" smtClean="0"/>
-              <a:t>5/14/2026</a:t>
+              <a:t>5/24/2026</a:t>
             </a:fld>
             <a:endParaRPr lang="en-US"/>
           </a:p>
@@ -2630,7 +2630,7 @@
           <a:p>
             <a:fld id="{6383FAE1-13DE-4511-8C1B-C8AFB720664C}" type="datetimeFigureOut">
               <a:rPr lang="en-US" smtClean="0"/>
-              <a:t>5/14/2026</a:t>
+              <a:t>5/24/2026</a:t>
             </a:fld>
             <a:endParaRPr lang="en-US"/>
           </a:p>
@@ -2941,7 +2941,7 @@
           <a:p>
             <a:fld id="{6383FAE1-13DE-4511-8C1B-C8AFB720664C}" type="datetimeFigureOut">
               <a:rPr lang="en-US" smtClean="0"/>
-              <a:t>5/14/2026</a:t>
+              <a:t>5/24/2026</a:t>
             </a:fld>
             <a:endParaRPr lang="en-US"/>
           </a:p>
@@ -3232,7 +3232,7 @@
           <a:p>
             <a:fld id="{6383FAE1-13DE-4511-8C1B-C8AFB720664C}" type="datetimeFigureOut">
               <a:rPr lang="en-US" smtClean="0"/>
-              <a:t>5/14/2026</a:t>
+              <a:t>5/24/2026</a:t>
             </a:fld>
             <a:endParaRPr lang="en-US"/>
           </a:p>
@@ -3476,7 +3476,7 @@
           <a:p>
             <a:fld id="{6383FAE1-13DE-4511-8C1B-C8AFB720664C}" type="datetimeFigureOut">
               <a:rPr lang="en-US" smtClean="0"/>
-              <a:t>5/14/2026</a:t>
+              <a:t>5/24/2026</a:t>
             </a:fld>
             <a:endParaRPr lang="en-US"/>
           </a:p>
@@ -5280,7 +5280,23 @@
                   </a:schemeClr>
                 </a:solidFill>
               </a:rPr>
-              <a:t>Only 42% of Jordanian adults have a bank account, which is remarkably low for a country with a strong education system and growing tech sector. Mobile penetration, on the other hand, reaches over 150% — meaning almost everyone has a phone, but most people are not in the formal financial system.</a:t>
+              <a:t>Only 42% of Jordanian adults have a bank account, which is remarkably low for a country with a strong education system and growing tech sector. </a:t>
+            </a:r>
+          </a:p>
+          <a:p>
+            <a:pPr>
+              <a:buNone/>
+            </a:pPr>
+            <a:r>
+              <a:rPr lang="en-US" sz="2400" dirty="0">
+                <a:solidFill>
+                  <a:schemeClr val="accent6">
+                    <a:lumMod val="60000"/>
+                    <a:lumOff val="40000"/>
+                  </a:schemeClr>
+                </a:solidFill>
+              </a:rPr>
+              <a:t>Mobile penetration, on the other hand, reaches over 150% — meaning almost everyone has a phone, but most people are not in the formal financial system.</a:t>
             </a:r>
           </a:p>
           <a:p>
@@ -5365,7 +5381,7 @@
         <p:spPr>
           <a:xfrm>
             <a:off x="451104" y="772311"/>
-            <a:ext cx="11740896" cy="2308324"/>
+            <a:ext cx="11740896" cy="3416320"/>
           </a:xfrm>
           <a:prstGeom prst="rect">
             <a:avLst/>
@@ -5410,7 +5426,88 @@
                   </a:schemeClr>
                 </a:solidFill>
               </a:rPr>
-              <a:t>This combination — high mobile penetration, low banking inclusion, a young tech-savvy population, and a large refugee community — creates a very specific set of problems that AI is uniquely positioned to solve.</a:t>
+              <a:t>This combination — </a:t>
+            </a:r>
+          </a:p>
+          <a:p>
+            <a:pPr marL="342900" indent="-342900">
+              <a:buFont typeface="Arial" panose="020B0604020202020204" pitchFamily="34" charset="0"/>
+              <a:buChar char="•"/>
+            </a:pPr>
+            <a:r>
+              <a:rPr lang="en-US" sz="2400" dirty="0">
+                <a:solidFill>
+                  <a:schemeClr val="accent6">
+                    <a:lumMod val="60000"/>
+                    <a:lumOff val="40000"/>
+                  </a:schemeClr>
+                </a:solidFill>
+              </a:rPr>
+              <a:t>high mobile penetration, </a:t>
+            </a:r>
+          </a:p>
+          <a:p>
+            <a:pPr marL="342900" indent="-342900">
+              <a:buFont typeface="Arial" panose="020B0604020202020204" pitchFamily="34" charset="0"/>
+              <a:buChar char="•"/>
+            </a:pPr>
+            <a:r>
+              <a:rPr lang="en-US" sz="2400" dirty="0">
+                <a:solidFill>
+                  <a:schemeClr val="accent6">
+                    <a:lumMod val="60000"/>
+                    <a:lumOff val="40000"/>
+                  </a:schemeClr>
+                </a:solidFill>
+              </a:rPr>
+              <a:t>low banking inclusion, </a:t>
+            </a:r>
+          </a:p>
+          <a:p>
+            <a:pPr marL="342900" indent="-342900">
+              <a:buFont typeface="Arial" panose="020B0604020202020204" pitchFamily="34" charset="0"/>
+              <a:buChar char="•"/>
+            </a:pPr>
+            <a:r>
+              <a:rPr lang="en-US" sz="2400" dirty="0">
+                <a:solidFill>
+                  <a:schemeClr val="accent6">
+                    <a:lumMod val="60000"/>
+                    <a:lumOff val="40000"/>
+                  </a:schemeClr>
+                </a:solidFill>
+              </a:rPr>
+              <a:t>a young tech-savvy population, and </a:t>
+            </a:r>
+          </a:p>
+          <a:p>
+            <a:pPr marL="342900" indent="-342900">
+              <a:buFont typeface="Arial" panose="020B0604020202020204" pitchFamily="34" charset="0"/>
+              <a:buChar char="•"/>
+            </a:pPr>
+            <a:r>
+              <a:rPr lang="en-US" sz="2400" dirty="0">
+                <a:solidFill>
+                  <a:schemeClr val="accent6">
+                    <a:lumMod val="60000"/>
+                    <a:lumOff val="40000"/>
+                  </a:schemeClr>
+                </a:solidFill>
+              </a:rPr>
+              <a:t>a large refugee community </a:t>
+            </a:r>
+          </a:p>
+          <a:p>
+            <a:r>
+              <a:rPr lang="en-US" sz="2400" dirty="0">
+                <a:solidFill>
+                  <a:schemeClr val="accent6">
+                    <a:lumMod val="60000"/>
+                    <a:lumOff val="40000"/>
+                  </a:schemeClr>
+                </a:solidFill>
+              </a:rPr>
+              <a:t>— creates a very specific set of problems that AI can solve.</a:t>
             </a:r>
           </a:p>
         </p:txBody>
